--- a/slides/day 4/D4C1_ProbNNs.pptx
+++ b/slides/day 4/D4C1_ProbNNs.pptx
@@ -1361,7 +1361,7 @@
           <a:p>
             <a:fld id="{FF5685EE-3D40-0A4E-BB88-46887330FC0A}" type="datetimeFigureOut">
               <a:rPr lang="en-US" smtClean="0"/>
-              <a:t>2/28/26</a:t>
+              <a:t>3/2/26</a:t>
             </a:fld>
             <a:endParaRPr lang="en-US"/>
           </a:p>
@@ -1673,35 +1673,7 @@
           <a:bodyPr/>
           <a:lstStyle/>
           <a:p>
-            <a:r>
-              <a:rPr lang="en-IE" dirty="0"/>
-              <a:t>If you use Mean Absolute Error (MAE) as a loss function, the "optimal" strategy for the model is to predict the </a:t>
-            </a:r>
-            <a:r>
-              <a:rPr lang="en-IE" b="1" dirty="0"/>
-              <a:t>median</a:t>
-            </a:r>
-            <a:r>
-              <a:rPr lang="en-IE" dirty="0"/>
-              <a:t>. If you use Mean Squared Error (MSE), it predicts the </a:t>
-            </a:r>
-            <a:r>
-              <a:rPr lang="en-IE" b="1" dirty="0"/>
-              <a:t>mean</a:t>
-            </a:r>
-            <a:r>
-              <a:rPr lang="en-IE" dirty="0"/>
-              <a:t>. Only proper scoring rules like CRPS force the model to estimate the </a:t>
-            </a:r>
-            <a:r>
-              <a:rPr lang="en-IE" b="1" dirty="0"/>
-              <a:t>entire distribution</a:t>
-            </a:r>
-            <a:r>
-              <a:rPr lang="en-IE" dirty="0"/>
-              <a:t> honestly.</a:t>
-            </a:r>
-            <a:endParaRPr lang="en-US" dirty="0"/>
+            <a:endParaRPr lang="en-US"/>
           </a:p>
         </p:txBody>
       </p:sp>
@@ -1722,7 +1694,7 @@
           <a:p>
             <a:fld id="{30752F2A-FA59-1746-ABA5-28C394E5ED08}" type="slidenum">
               <a:rPr lang="en-US" smtClean="0"/>
-              <a:t>4</a:t>
+              <a:t>1</a:t>
             </a:fld>
             <a:endParaRPr lang="en-US"/>
           </a:p>
@@ -1731,7 +1703,858 @@
     </p:spTree>
     <p:extLst>
       <p:ext uri="{BB962C8B-B14F-4D97-AF65-F5344CB8AC3E}">
-        <p14:creationId xmlns:p14="http://schemas.microsoft.com/office/powerpoint/2010/main" val="1027432635"/>
+        <p14:creationId xmlns:p14="http://schemas.microsoft.com/office/powerpoint/2010/main" val="914368800"/>
+      </p:ext>
+    </p:extLst>
+  </p:cSld>
+  <p:clrMapOvr>
+    <a:masterClrMapping/>
+  </p:clrMapOvr>
+</p:notes>
+</file>
+
+<file path=ppt/notesSlides/notesSlide10.xml><?xml version="1.0" encoding="utf-8"?>
+<p:notes xmlns:a="http://schemas.openxmlformats.org/drawingml/2006/main" xmlns:r="http://schemas.openxmlformats.org/officeDocument/2006/relationships" xmlns:p="http://schemas.openxmlformats.org/presentationml/2006/main">
+  <p:cSld>
+    <p:spTree>
+      <p:nvGrpSpPr>
+        <p:cNvPr id="1" name=""/>
+        <p:cNvGrpSpPr/>
+        <p:nvPr/>
+      </p:nvGrpSpPr>
+      <p:grpSpPr>
+        <a:xfrm>
+          <a:off x="0" y="0"/>
+          <a:ext cx="0" cy="0"/>
+          <a:chOff x="0" y="0"/>
+          <a:chExt cx="0" cy="0"/>
+        </a:xfrm>
+      </p:grpSpPr>
+      <p:sp>
+        <p:nvSpPr>
+          <p:cNvPr id="2" name="Slide Image Placeholder 1"/>
+          <p:cNvSpPr>
+            <a:spLocks noGrp="1" noRot="1" noChangeAspect="1"/>
+          </p:cNvSpPr>
+          <p:nvPr>
+            <p:ph type="sldImg"/>
+          </p:nvPr>
+        </p:nvSpPr>
+        <p:spPr/>
+      </p:sp>
+      <p:sp>
+        <p:nvSpPr>
+          <p:cNvPr id="3" name="Notes Placeholder 2"/>
+          <p:cNvSpPr>
+            <a:spLocks noGrp="1"/>
+          </p:cNvSpPr>
+          <p:nvPr>
+            <p:ph type="body" idx="1"/>
+          </p:nvPr>
+        </p:nvSpPr>
+        <p:spPr/>
+        <p:txBody>
+          <a:bodyPr/>
+          <a:lstStyle/>
+          <a:p>
+            <a:r>
+              <a:rPr lang="en-US"/>
+              <a:t>Do not modify the notes in this section to avoid tampering with the Poll Everywhere activity.
+More info at polleverywhere.com/support
+The CRPS is often described as a generalisation of the Mean Absolute Error (MAE). If a model provides a perfectly "sharp" deterministic forecast (where the standard deviation $$\sigma$$ is zero), what does the CRPS value become?</a:t>
+            </a:r>
+          </a:p>
+          <a:p>
+            <a:r>
+              <a:rPr lang="en-US"/>
+              <a:t>https://www.polleverywhere.com/multiple_choice_polls/P3B4HihRUR32bagwfF4v6?state=opened&amp;flow=Default&amp;onscreen=persist</a:t>
+            </a:r>
+          </a:p>
+        </p:txBody>
+      </p:sp>
+      <p:sp>
+        <p:nvSpPr>
+          <p:cNvPr id="4" name="Slide Number Placeholder 3"/>
+          <p:cNvSpPr>
+            <a:spLocks noGrp="1"/>
+          </p:cNvSpPr>
+          <p:nvPr>
+            <p:ph type="sldNum" sz="quarter" idx="5"/>
+          </p:nvPr>
+        </p:nvSpPr>
+        <p:spPr/>
+        <p:txBody>
+          <a:bodyPr/>
+          <a:lstStyle/>
+          <a:p>
+            <a:fld id="{30752F2A-FA59-1746-ABA5-28C394E5ED08}" type="slidenum">
+              <a:rPr lang="en-US" smtClean="0"/>
+              <a:t>10</a:t>
+            </a:fld>
+            <a:endParaRPr lang="en-US"/>
+          </a:p>
+        </p:txBody>
+      </p:sp>
+    </p:spTree>
+    <p:extLst>
+      <p:ext uri="{BB962C8B-B14F-4D97-AF65-F5344CB8AC3E}">
+        <p14:creationId xmlns:p14="http://schemas.microsoft.com/office/powerpoint/2010/main" val="3046797145"/>
+      </p:ext>
+    </p:extLst>
+  </p:cSld>
+  <p:clrMapOvr>
+    <a:masterClrMapping/>
+  </p:clrMapOvr>
+</p:notes>
+</file>
+
+<file path=ppt/notesSlides/notesSlide11.xml><?xml version="1.0" encoding="utf-8"?>
+<p:notes xmlns:a="http://schemas.openxmlformats.org/drawingml/2006/main" xmlns:r="http://schemas.openxmlformats.org/officeDocument/2006/relationships" xmlns:p="http://schemas.openxmlformats.org/presentationml/2006/main">
+  <p:cSld>
+    <p:spTree>
+      <p:nvGrpSpPr>
+        <p:cNvPr id="1" name=""/>
+        <p:cNvGrpSpPr/>
+        <p:nvPr/>
+      </p:nvGrpSpPr>
+      <p:grpSpPr>
+        <a:xfrm>
+          <a:off x="0" y="0"/>
+          <a:ext cx="0" cy="0"/>
+          <a:chOff x="0" y="0"/>
+          <a:chExt cx="0" cy="0"/>
+        </a:xfrm>
+      </p:grpSpPr>
+      <p:sp>
+        <p:nvSpPr>
+          <p:cNvPr id="2" name="Slide Image Placeholder 1"/>
+          <p:cNvSpPr>
+            <a:spLocks noGrp="1" noRot="1" noChangeAspect="1"/>
+          </p:cNvSpPr>
+          <p:nvPr>
+            <p:ph type="sldImg"/>
+          </p:nvPr>
+        </p:nvSpPr>
+        <p:spPr/>
+      </p:sp>
+      <p:sp>
+        <p:nvSpPr>
+          <p:cNvPr id="3" name="Notes Placeholder 2"/>
+          <p:cNvSpPr>
+            <a:spLocks noGrp="1"/>
+          </p:cNvSpPr>
+          <p:nvPr>
+            <p:ph type="body" idx="1"/>
+          </p:nvPr>
+        </p:nvSpPr>
+        <p:spPr/>
+        <p:txBody>
+          <a:bodyPr/>
+          <a:lstStyle/>
+          <a:p>
+            <a:endParaRPr lang="en-US"/>
+          </a:p>
+        </p:txBody>
+      </p:sp>
+      <p:sp>
+        <p:nvSpPr>
+          <p:cNvPr id="4" name="Slide Number Placeholder 3"/>
+          <p:cNvSpPr>
+            <a:spLocks noGrp="1"/>
+          </p:cNvSpPr>
+          <p:nvPr>
+            <p:ph type="sldNum" sz="quarter" idx="5"/>
+          </p:nvPr>
+        </p:nvSpPr>
+        <p:spPr/>
+        <p:txBody>
+          <a:bodyPr/>
+          <a:lstStyle/>
+          <a:p>
+            <a:fld id="{30752F2A-FA59-1746-ABA5-28C394E5ED08}" type="slidenum">
+              <a:rPr lang="en-US" smtClean="0"/>
+              <a:t>11</a:t>
+            </a:fld>
+            <a:endParaRPr lang="en-US"/>
+          </a:p>
+        </p:txBody>
+      </p:sp>
+    </p:spTree>
+    <p:extLst>
+      <p:ext uri="{BB962C8B-B14F-4D97-AF65-F5344CB8AC3E}">
+        <p14:creationId xmlns:p14="http://schemas.microsoft.com/office/powerpoint/2010/main" val="3767072025"/>
+      </p:ext>
+    </p:extLst>
+  </p:cSld>
+  <p:clrMapOvr>
+    <a:masterClrMapping/>
+  </p:clrMapOvr>
+</p:notes>
+</file>
+
+<file path=ppt/notesSlides/notesSlide12.xml><?xml version="1.0" encoding="utf-8"?>
+<p:notes xmlns:a="http://schemas.openxmlformats.org/drawingml/2006/main" xmlns:r="http://schemas.openxmlformats.org/officeDocument/2006/relationships" xmlns:p="http://schemas.openxmlformats.org/presentationml/2006/main">
+  <p:cSld>
+    <p:spTree>
+      <p:nvGrpSpPr>
+        <p:cNvPr id="1" name=""/>
+        <p:cNvGrpSpPr/>
+        <p:nvPr/>
+      </p:nvGrpSpPr>
+      <p:grpSpPr>
+        <a:xfrm>
+          <a:off x="0" y="0"/>
+          <a:ext cx="0" cy="0"/>
+          <a:chOff x="0" y="0"/>
+          <a:chExt cx="0" cy="0"/>
+        </a:xfrm>
+      </p:grpSpPr>
+      <p:sp>
+        <p:nvSpPr>
+          <p:cNvPr id="2" name="Slide Image Placeholder 1"/>
+          <p:cNvSpPr>
+            <a:spLocks noGrp="1" noRot="1" noChangeAspect="1"/>
+          </p:cNvSpPr>
+          <p:nvPr>
+            <p:ph type="sldImg"/>
+          </p:nvPr>
+        </p:nvSpPr>
+        <p:spPr/>
+      </p:sp>
+      <p:sp>
+        <p:nvSpPr>
+          <p:cNvPr id="3" name="Notes Placeholder 2"/>
+          <p:cNvSpPr>
+            <a:spLocks noGrp="1"/>
+          </p:cNvSpPr>
+          <p:nvPr>
+            <p:ph type="body" idx="1"/>
+          </p:nvPr>
+        </p:nvSpPr>
+        <p:spPr/>
+        <p:txBody>
+          <a:bodyPr/>
+          <a:lstStyle/>
+          <a:p>
+            <a:endParaRPr lang="en-US"/>
+          </a:p>
+        </p:txBody>
+      </p:sp>
+      <p:sp>
+        <p:nvSpPr>
+          <p:cNvPr id="4" name="Slide Number Placeholder 3"/>
+          <p:cNvSpPr>
+            <a:spLocks noGrp="1"/>
+          </p:cNvSpPr>
+          <p:nvPr>
+            <p:ph type="sldNum" sz="quarter" idx="5"/>
+          </p:nvPr>
+        </p:nvSpPr>
+        <p:spPr/>
+        <p:txBody>
+          <a:bodyPr/>
+          <a:lstStyle/>
+          <a:p>
+            <a:fld id="{30752F2A-FA59-1746-ABA5-28C394E5ED08}" type="slidenum">
+              <a:rPr lang="en-US" smtClean="0"/>
+              <a:t>12</a:t>
+            </a:fld>
+            <a:endParaRPr lang="en-US"/>
+          </a:p>
+        </p:txBody>
+      </p:sp>
+    </p:spTree>
+    <p:extLst>
+      <p:ext uri="{BB962C8B-B14F-4D97-AF65-F5344CB8AC3E}">
+        <p14:creationId xmlns:p14="http://schemas.microsoft.com/office/powerpoint/2010/main" val="3944556592"/>
+      </p:ext>
+    </p:extLst>
+  </p:cSld>
+  <p:clrMapOvr>
+    <a:masterClrMapping/>
+  </p:clrMapOvr>
+</p:notes>
+</file>
+
+<file path=ppt/notesSlides/notesSlide13.xml><?xml version="1.0" encoding="utf-8"?>
+<p:notes xmlns:a="http://schemas.openxmlformats.org/drawingml/2006/main" xmlns:r="http://schemas.openxmlformats.org/officeDocument/2006/relationships" xmlns:p="http://schemas.openxmlformats.org/presentationml/2006/main">
+  <p:cSld>
+    <p:spTree>
+      <p:nvGrpSpPr>
+        <p:cNvPr id="1" name=""/>
+        <p:cNvGrpSpPr/>
+        <p:nvPr/>
+      </p:nvGrpSpPr>
+      <p:grpSpPr>
+        <a:xfrm>
+          <a:off x="0" y="0"/>
+          <a:ext cx="0" cy="0"/>
+          <a:chOff x="0" y="0"/>
+          <a:chExt cx="0" cy="0"/>
+        </a:xfrm>
+      </p:grpSpPr>
+      <p:sp>
+        <p:nvSpPr>
+          <p:cNvPr id="2" name="Slide Image Placeholder 1"/>
+          <p:cNvSpPr>
+            <a:spLocks noGrp="1" noRot="1" noChangeAspect="1"/>
+          </p:cNvSpPr>
+          <p:nvPr>
+            <p:ph type="sldImg"/>
+          </p:nvPr>
+        </p:nvSpPr>
+        <p:spPr/>
+      </p:sp>
+      <p:sp>
+        <p:nvSpPr>
+          <p:cNvPr id="3" name="Notes Placeholder 2"/>
+          <p:cNvSpPr>
+            <a:spLocks noGrp="1"/>
+          </p:cNvSpPr>
+          <p:nvPr>
+            <p:ph type="body" idx="1"/>
+          </p:nvPr>
+        </p:nvSpPr>
+        <p:spPr/>
+        <p:txBody>
+          <a:bodyPr/>
+          <a:lstStyle/>
+          <a:p>
+            <a:endParaRPr lang="en-US"/>
+          </a:p>
+        </p:txBody>
+      </p:sp>
+      <p:sp>
+        <p:nvSpPr>
+          <p:cNvPr id="4" name="Slide Number Placeholder 3"/>
+          <p:cNvSpPr>
+            <a:spLocks noGrp="1"/>
+          </p:cNvSpPr>
+          <p:nvPr>
+            <p:ph type="sldNum" sz="quarter" idx="5"/>
+          </p:nvPr>
+        </p:nvSpPr>
+        <p:spPr/>
+        <p:txBody>
+          <a:bodyPr/>
+          <a:lstStyle/>
+          <a:p>
+            <a:fld id="{30752F2A-FA59-1746-ABA5-28C394E5ED08}" type="slidenum">
+              <a:rPr lang="en-US" smtClean="0"/>
+              <a:t>13</a:t>
+            </a:fld>
+            <a:endParaRPr lang="en-US"/>
+          </a:p>
+        </p:txBody>
+      </p:sp>
+    </p:spTree>
+    <p:extLst>
+      <p:ext uri="{BB962C8B-B14F-4D97-AF65-F5344CB8AC3E}">
+        <p14:creationId xmlns:p14="http://schemas.microsoft.com/office/powerpoint/2010/main" val="1930222149"/>
+      </p:ext>
+    </p:extLst>
+  </p:cSld>
+  <p:clrMapOvr>
+    <a:masterClrMapping/>
+  </p:clrMapOvr>
+</p:notes>
+</file>
+
+<file path=ppt/notesSlides/notesSlide14.xml><?xml version="1.0" encoding="utf-8"?>
+<p:notes xmlns:a="http://schemas.openxmlformats.org/drawingml/2006/main" xmlns:r="http://schemas.openxmlformats.org/officeDocument/2006/relationships" xmlns:p="http://schemas.openxmlformats.org/presentationml/2006/main">
+  <p:cSld>
+    <p:spTree>
+      <p:nvGrpSpPr>
+        <p:cNvPr id="1" name=""/>
+        <p:cNvGrpSpPr/>
+        <p:nvPr/>
+      </p:nvGrpSpPr>
+      <p:grpSpPr>
+        <a:xfrm>
+          <a:off x="0" y="0"/>
+          <a:ext cx="0" cy="0"/>
+          <a:chOff x="0" y="0"/>
+          <a:chExt cx="0" cy="0"/>
+        </a:xfrm>
+      </p:grpSpPr>
+      <p:sp>
+        <p:nvSpPr>
+          <p:cNvPr id="2" name="Slide Image Placeholder 1"/>
+          <p:cNvSpPr>
+            <a:spLocks noGrp="1" noRot="1" noChangeAspect="1"/>
+          </p:cNvSpPr>
+          <p:nvPr>
+            <p:ph type="sldImg"/>
+          </p:nvPr>
+        </p:nvSpPr>
+        <p:spPr/>
+      </p:sp>
+      <p:sp>
+        <p:nvSpPr>
+          <p:cNvPr id="3" name="Notes Placeholder 2"/>
+          <p:cNvSpPr>
+            <a:spLocks noGrp="1"/>
+          </p:cNvSpPr>
+          <p:nvPr>
+            <p:ph type="body" idx="1"/>
+          </p:nvPr>
+        </p:nvSpPr>
+        <p:spPr/>
+        <p:txBody>
+          <a:bodyPr/>
+          <a:lstStyle/>
+          <a:p>
+            <a:endParaRPr lang="en-US"/>
+          </a:p>
+        </p:txBody>
+      </p:sp>
+      <p:sp>
+        <p:nvSpPr>
+          <p:cNvPr id="4" name="Slide Number Placeholder 3"/>
+          <p:cNvSpPr>
+            <a:spLocks noGrp="1"/>
+          </p:cNvSpPr>
+          <p:nvPr>
+            <p:ph type="sldNum" sz="quarter" idx="5"/>
+          </p:nvPr>
+        </p:nvSpPr>
+        <p:spPr/>
+        <p:txBody>
+          <a:bodyPr/>
+          <a:lstStyle/>
+          <a:p>
+            <a:fld id="{30752F2A-FA59-1746-ABA5-28C394E5ED08}" type="slidenum">
+              <a:rPr lang="en-US" smtClean="0"/>
+              <a:t>14</a:t>
+            </a:fld>
+            <a:endParaRPr lang="en-US"/>
+          </a:p>
+        </p:txBody>
+      </p:sp>
+    </p:spTree>
+    <p:extLst>
+      <p:ext uri="{BB962C8B-B14F-4D97-AF65-F5344CB8AC3E}">
+        <p14:creationId xmlns:p14="http://schemas.microsoft.com/office/powerpoint/2010/main" val="188877938"/>
+      </p:ext>
+    </p:extLst>
+  </p:cSld>
+  <p:clrMapOvr>
+    <a:masterClrMapping/>
+  </p:clrMapOvr>
+</p:notes>
+</file>
+
+<file path=ppt/notesSlides/notesSlide15.xml><?xml version="1.0" encoding="utf-8"?>
+<p:notes xmlns:a="http://schemas.openxmlformats.org/drawingml/2006/main" xmlns:r="http://schemas.openxmlformats.org/officeDocument/2006/relationships" xmlns:p="http://schemas.openxmlformats.org/presentationml/2006/main">
+  <p:cSld>
+    <p:spTree>
+      <p:nvGrpSpPr>
+        <p:cNvPr id="1" name=""/>
+        <p:cNvGrpSpPr/>
+        <p:nvPr/>
+      </p:nvGrpSpPr>
+      <p:grpSpPr>
+        <a:xfrm>
+          <a:off x="0" y="0"/>
+          <a:ext cx="0" cy="0"/>
+          <a:chOff x="0" y="0"/>
+          <a:chExt cx="0" cy="0"/>
+        </a:xfrm>
+      </p:grpSpPr>
+      <p:sp>
+        <p:nvSpPr>
+          <p:cNvPr id="2" name="Slide Image Placeholder 1"/>
+          <p:cNvSpPr>
+            <a:spLocks noGrp="1" noRot="1" noChangeAspect="1"/>
+          </p:cNvSpPr>
+          <p:nvPr>
+            <p:ph type="sldImg"/>
+          </p:nvPr>
+        </p:nvSpPr>
+        <p:spPr/>
+      </p:sp>
+      <p:sp>
+        <p:nvSpPr>
+          <p:cNvPr id="3" name="Notes Placeholder 2"/>
+          <p:cNvSpPr>
+            <a:spLocks noGrp="1"/>
+          </p:cNvSpPr>
+          <p:nvPr>
+            <p:ph type="body" idx="1"/>
+          </p:nvPr>
+        </p:nvSpPr>
+        <p:spPr/>
+        <p:txBody>
+          <a:bodyPr/>
+          <a:lstStyle/>
+          <a:p>
+            <a:endParaRPr lang="en-US"/>
+          </a:p>
+        </p:txBody>
+      </p:sp>
+      <p:sp>
+        <p:nvSpPr>
+          <p:cNvPr id="4" name="Slide Number Placeholder 3"/>
+          <p:cNvSpPr>
+            <a:spLocks noGrp="1"/>
+          </p:cNvSpPr>
+          <p:nvPr>
+            <p:ph type="sldNum" sz="quarter" idx="5"/>
+          </p:nvPr>
+        </p:nvSpPr>
+        <p:spPr/>
+        <p:txBody>
+          <a:bodyPr/>
+          <a:lstStyle/>
+          <a:p>
+            <a:fld id="{30752F2A-FA59-1746-ABA5-28C394E5ED08}" type="slidenum">
+              <a:rPr lang="en-US" smtClean="0"/>
+              <a:t>15</a:t>
+            </a:fld>
+            <a:endParaRPr lang="en-US"/>
+          </a:p>
+        </p:txBody>
+      </p:sp>
+    </p:spTree>
+    <p:extLst>
+      <p:ext uri="{BB962C8B-B14F-4D97-AF65-F5344CB8AC3E}">
+        <p14:creationId xmlns:p14="http://schemas.microsoft.com/office/powerpoint/2010/main" val="2588756043"/>
+      </p:ext>
+    </p:extLst>
+  </p:cSld>
+  <p:clrMapOvr>
+    <a:masterClrMapping/>
+  </p:clrMapOvr>
+</p:notes>
+</file>
+
+<file path=ppt/notesSlides/notesSlide16.xml><?xml version="1.0" encoding="utf-8"?>
+<p:notes xmlns:a="http://schemas.openxmlformats.org/drawingml/2006/main" xmlns:r="http://schemas.openxmlformats.org/officeDocument/2006/relationships" xmlns:p="http://schemas.openxmlformats.org/presentationml/2006/main">
+  <p:cSld>
+    <p:spTree>
+      <p:nvGrpSpPr>
+        <p:cNvPr id="1" name=""/>
+        <p:cNvGrpSpPr/>
+        <p:nvPr/>
+      </p:nvGrpSpPr>
+      <p:grpSpPr>
+        <a:xfrm>
+          <a:off x="0" y="0"/>
+          <a:ext cx="0" cy="0"/>
+          <a:chOff x="0" y="0"/>
+          <a:chExt cx="0" cy="0"/>
+        </a:xfrm>
+      </p:grpSpPr>
+      <p:sp>
+        <p:nvSpPr>
+          <p:cNvPr id="2" name="Slide Image Placeholder 1"/>
+          <p:cNvSpPr>
+            <a:spLocks noGrp="1" noRot="1" noChangeAspect="1"/>
+          </p:cNvSpPr>
+          <p:nvPr>
+            <p:ph type="sldImg"/>
+          </p:nvPr>
+        </p:nvSpPr>
+        <p:spPr/>
+      </p:sp>
+      <p:sp>
+        <p:nvSpPr>
+          <p:cNvPr id="3" name="Notes Placeholder 2"/>
+          <p:cNvSpPr>
+            <a:spLocks noGrp="1"/>
+          </p:cNvSpPr>
+          <p:nvPr>
+            <p:ph type="body" idx="1"/>
+          </p:nvPr>
+        </p:nvSpPr>
+        <p:spPr/>
+        <p:txBody>
+          <a:bodyPr/>
+          <a:lstStyle/>
+          <a:p>
+            <a:endParaRPr lang="en-US"/>
+          </a:p>
+        </p:txBody>
+      </p:sp>
+      <p:sp>
+        <p:nvSpPr>
+          <p:cNvPr id="4" name="Slide Number Placeholder 3"/>
+          <p:cNvSpPr>
+            <a:spLocks noGrp="1"/>
+          </p:cNvSpPr>
+          <p:nvPr>
+            <p:ph type="sldNum" sz="quarter" idx="5"/>
+          </p:nvPr>
+        </p:nvSpPr>
+        <p:spPr/>
+        <p:txBody>
+          <a:bodyPr/>
+          <a:lstStyle/>
+          <a:p>
+            <a:fld id="{30752F2A-FA59-1746-ABA5-28C394E5ED08}" type="slidenum">
+              <a:rPr lang="en-US" smtClean="0"/>
+              <a:t>16</a:t>
+            </a:fld>
+            <a:endParaRPr lang="en-US"/>
+          </a:p>
+        </p:txBody>
+      </p:sp>
+    </p:spTree>
+    <p:extLst>
+      <p:ext uri="{BB962C8B-B14F-4D97-AF65-F5344CB8AC3E}">
+        <p14:creationId xmlns:p14="http://schemas.microsoft.com/office/powerpoint/2010/main" val="3682593222"/>
+      </p:ext>
+    </p:extLst>
+  </p:cSld>
+  <p:clrMapOvr>
+    <a:masterClrMapping/>
+  </p:clrMapOvr>
+</p:notes>
+</file>
+
+<file path=ppt/notesSlides/notesSlide17.xml><?xml version="1.0" encoding="utf-8"?>
+<p:notes xmlns:a="http://schemas.openxmlformats.org/drawingml/2006/main" xmlns:r="http://schemas.openxmlformats.org/officeDocument/2006/relationships" xmlns:p="http://schemas.openxmlformats.org/presentationml/2006/main">
+  <p:cSld>
+    <p:spTree>
+      <p:nvGrpSpPr>
+        <p:cNvPr id="1" name=""/>
+        <p:cNvGrpSpPr/>
+        <p:nvPr/>
+      </p:nvGrpSpPr>
+      <p:grpSpPr>
+        <a:xfrm>
+          <a:off x="0" y="0"/>
+          <a:ext cx="0" cy="0"/>
+          <a:chOff x="0" y="0"/>
+          <a:chExt cx="0" cy="0"/>
+        </a:xfrm>
+      </p:grpSpPr>
+      <p:sp>
+        <p:nvSpPr>
+          <p:cNvPr id="2" name="Slide Image Placeholder 1"/>
+          <p:cNvSpPr>
+            <a:spLocks noGrp="1" noRot="1" noChangeAspect="1"/>
+          </p:cNvSpPr>
+          <p:nvPr>
+            <p:ph type="sldImg"/>
+          </p:nvPr>
+        </p:nvSpPr>
+        <p:spPr/>
+      </p:sp>
+      <p:sp>
+        <p:nvSpPr>
+          <p:cNvPr id="3" name="Notes Placeholder 2"/>
+          <p:cNvSpPr>
+            <a:spLocks noGrp="1"/>
+          </p:cNvSpPr>
+          <p:nvPr>
+            <p:ph type="body" idx="1"/>
+          </p:nvPr>
+        </p:nvSpPr>
+        <p:spPr/>
+        <p:txBody>
+          <a:bodyPr/>
+          <a:lstStyle/>
+          <a:p>
+            <a:endParaRPr lang="en-US"/>
+          </a:p>
+        </p:txBody>
+      </p:sp>
+      <p:sp>
+        <p:nvSpPr>
+          <p:cNvPr id="4" name="Slide Number Placeholder 3"/>
+          <p:cNvSpPr>
+            <a:spLocks noGrp="1"/>
+          </p:cNvSpPr>
+          <p:nvPr>
+            <p:ph type="sldNum" sz="quarter" idx="5"/>
+          </p:nvPr>
+        </p:nvSpPr>
+        <p:spPr/>
+        <p:txBody>
+          <a:bodyPr/>
+          <a:lstStyle/>
+          <a:p>
+            <a:fld id="{30752F2A-FA59-1746-ABA5-28C394E5ED08}" type="slidenum">
+              <a:rPr lang="en-US" smtClean="0"/>
+              <a:t>17</a:t>
+            </a:fld>
+            <a:endParaRPr lang="en-US"/>
+          </a:p>
+        </p:txBody>
+      </p:sp>
+    </p:spTree>
+    <p:extLst>
+      <p:ext uri="{BB962C8B-B14F-4D97-AF65-F5344CB8AC3E}">
+        <p14:creationId xmlns:p14="http://schemas.microsoft.com/office/powerpoint/2010/main" val="1191098541"/>
+      </p:ext>
+    </p:extLst>
+  </p:cSld>
+  <p:clrMapOvr>
+    <a:masterClrMapping/>
+  </p:clrMapOvr>
+</p:notes>
+</file>
+
+<file path=ppt/notesSlides/notesSlide18.xml><?xml version="1.0" encoding="utf-8"?>
+<p:notes xmlns:a="http://schemas.openxmlformats.org/drawingml/2006/main" xmlns:r="http://schemas.openxmlformats.org/officeDocument/2006/relationships" xmlns:p="http://schemas.openxmlformats.org/presentationml/2006/main">
+  <p:cSld>
+    <p:spTree>
+      <p:nvGrpSpPr>
+        <p:cNvPr id="1" name=""/>
+        <p:cNvGrpSpPr/>
+        <p:nvPr/>
+      </p:nvGrpSpPr>
+      <p:grpSpPr>
+        <a:xfrm>
+          <a:off x="0" y="0"/>
+          <a:ext cx="0" cy="0"/>
+          <a:chOff x="0" y="0"/>
+          <a:chExt cx="0" cy="0"/>
+        </a:xfrm>
+      </p:grpSpPr>
+      <p:sp>
+        <p:nvSpPr>
+          <p:cNvPr id="2" name="Slide Image Placeholder 1"/>
+          <p:cNvSpPr>
+            <a:spLocks noGrp="1" noRot="1" noChangeAspect="1"/>
+          </p:cNvSpPr>
+          <p:nvPr>
+            <p:ph type="sldImg"/>
+          </p:nvPr>
+        </p:nvSpPr>
+        <p:spPr/>
+      </p:sp>
+      <p:sp>
+        <p:nvSpPr>
+          <p:cNvPr id="3" name="Notes Placeholder 2"/>
+          <p:cNvSpPr>
+            <a:spLocks noGrp="1"/>
+          </p:cNvSpPr>
+          <p:nvPr>
+            <p:ph type="body" idx="1"/>
+          </p:nvPr>
+        </p:nvSpPr>
+        <p:spPr/>
+        <p:txBody>
+          <a:bodyPr/>
+          <a:lstStyle/>
+          <a:p>
+            <a:endParaRPr lang="en-US"/>
+          </a:p>
+        </p:txBody>
+      </p:sp>
+      <p:sp>
+        <p:nvSpPr>
+          <p:cNvPr id="4" name="Slide Number Placeholder 3"/>
+          <p:cNvSpPr>
+            <a:spLocks noGrp="1"/>
+          </p:cNvSpPr>
+          <p:nvPr>
+            <p:ph type="sldNum" sz="quarter" idx="5"/>
+          </p:nvPr>
+        </p:nvSpPr>
+        <p:spPr/>
+        <p:txBody>
+          <a:bodyPr/>
+          <a:lstStyle/>
+          <a:p>
+            <a:fld id="{30752F2A-FA59-1746-ABA5-28C394E5ED08}" type="slidenum">
+              <a:rPr lang="en-US" smtClean="0"/>
+              <a:t>18</a:t>
+            </a:fld>
+            <a:endParaRPr lang="en-US"/>
+          </a:p>
+        </p:txBody>
+      </p:sp>
+    </p:spTree>
+    <p:extLst>
+      <p:ext uri="{BB962C8B-B14F-4D97-AF65-F5344CB8AC3E}">
+        <p14:creationId xmlns:p14="http://schemas.microsoft.com/office/powerpoint/2010/main" val="3870050214"/>
+      </p:ext>
+    </p:extLst>
+  </p:cSld>
+  <p:clrMapOvr>
+    <a:masterClrMapping/>
+  </p:clrMapOvr>
+</p:notes>
+</file>
+
+<file path=ppt/notesSlides/notesSlide19.xml><?xml version="1.0" encoding="utf-8"?>
+<p:notes xmlns:a="http://schemas.openxmlformats.org/drawingml/2006/main" xmlns:r="http://schemas.openxmlformats.org/officeDocument/2006/relationships" xmlns:p="http://schemas.openxmlformats.org/presentationml/2006/main">
+  <p:cSld>
+    <p:spTree>
+      <p:nvGrpSpPr>
+        <p:cNvPr id="1" name=""/>
+        <p:cNvGrpSpPr/>
+        <p:nvPr/>
+      </p:nvGrpSpPr>
+      <p:grpSpPr>
+        <a:xfrm>
+          <a:off x="0" y="0"/>
+          <a:ext cx="0" cy="0"/>
+          <a:chOff x="0" y="0"/>
+          <a:chExt cx="0" cy="0"/>
+        </a:xfrm>
+      </p:grpSpPr>
+      <p:sp>
+        <p:nvSpPr>
+          <p:cNvPr id="2" name="Slide Image Placeholder 1"/>
+          <p:cNvSpPr>
+            <a:spLocks noGrp="1" noRot="1" noChangeAspect="1"/>
+          </p:cNvSpPr>
+          <p:nvPr>
+            <p:ph type="sldImg"/>
+          </p:nvPr>
+        </p:nvSpPr>
+        <p:spPr/>
+      </p:sp>
+      <p:sp>
+        <p:nvSpPr>
+          <p:cNvPr id="3" name="Notes Placeholder 2"/>
+          <p:cNvSpPr>
+            <a:spLocks noGrp="1"/>
+          </p:cNvSpPr>
+          <p:nvPr>
+            <p:ph type="body" idx="1"/>
+          </p:nvPr>
+        </p:nvSpPr>
+        <p:spPr/>
+        <p:txBody>
+          <a:bodyPr/>
+          <a:lstStyle/>
+          <a:p>
+            <a:endParaRPr lang="en-US"/>
+          </a:p>
+        </p:txBody>
+      </p:sp>
+      <p:sp>
+        <p:nvSpPr>
+          <p:cNvPr id="4" name="Slide Number Placeholder 3"/>
+          <p:cNvSpPr>
+            <a:spLocks noGrp="1"/>
+          </p:cNvSpPr>
+          <p:nvPr>
+            <p:ph type="sldNum" sz="quarter" idx="5"/>
+          </p:nvPr>
+        </p:nvSpPr>
+        <p:spPr/>
+        <p:txBody>
+          <a:bodyPr/>
+          <a:lstStyle/>
+          <a:p>
+            <a:fld id="{30752F2A-FA59-1746-ABA5-28C394E5ED08}" type="slidenum">
+              <a:rPr lang="en-US" smtClean="0"/>
+              <a:t>19</a:t>
+            </a:fld>
+            <a:endParaRPr lang="en-US"/>
+          </a:p>
+        </p:txBody>
+      </p:sp>
+    </p:spTree>
+    <p:extLst>
+      <p:ext uri="{BB962C8B-B14F-4D97-AF65-F5344CB8AC3E}">
+        <p14:creationId xmlns:p14="http://schemas.microsoft.com/office/powerpoint/2010/main" val="2368944795"/>
       </p:ext>
     </p:extLst>
   </p:cSld>
@@ -1785,59 +2608,7 @@
           <a:bodyPr/>
           <a:lstStyle/>
           <a:p>
-            <a:r>
-              <a:rPr lang="en-IE" dirty="0"/>
-              <a:t>Reasoning: </a:t>
-            </a:r>
-            <a:r>
-              <a:rPr lang="en-IE" sz="1200" kern="1200" dirty="0">
-                <a:solidFill>
-                  <a:schemeClr val="tx1"/>
-                </a:solidFill>
-                <a:effectLst/>
-                <a:latin typeface="+mn-lt"/>
-                <a:ea typeface="+mn-ea"/>
-                <a:cs typeface="+mn-cs"/>
-              </a:rPr>
-              <a:t>$(0.5 - 1)^2 = 0.25$</a:t>
-            </a:r>
-            <a:r>
-              <a:rPr lang="en-IE" dirty="0"/>
-              <a:t> and </a:t>
-            </a:r>
-            <a:r>
-              <a:rPr lang="en-IE" sz="1200" kern="1200" dirty="0">
-                <a:solidFill>
-                  <a:schemeClr val="tx1"/>
-                </a:solidFill>
-                <a:effectLst/>
-                <a:latin typeface="+mn-lt"/>
-                <a:ea typeface="+mn-ea"/>
-                <a:cs typeface="+mn-cs"/>
-              </a:rPr>
-              <a:t>$(0.5 - 0)^2 = 0.25$</a:t>
-            </a:r>
-            <a:r>
-              <a:rPr lang="en-IE" dirty="0"/>
-              <a:t>. Since rain happens 50% of the time, the average score is </a:t>
-            </a:r>
-            <a:r>
-              <a:rPr lang="en-IE" sz="1200" kern="1200" dirty="0">
-                <a:solidFill>
-                  <a:schemeClr val="tx1"/>
-                </a:solidFill>
-                <a:effectLst/>
-                <a:latin typeface="+mn-lt"/>
-                <a:ea typeface="+mn-ea"/>
-                <a:cs typeface="+mn-cs"/>
-              </a:rPr>
-              <a:t>$0.25$</a:t>
-            </a:r>
-            <a:r>
-              <a:rPr lang="en-IE" dirty="0"/>
-              <a:t>. This teaches students that a Brier Score can be "okay" while the forecast is still "unsharp" (uninformative).</a:t>
-            </a:r>
-            <a:endParaRPr lang="en-US" dirty="0"/>
+            <a:endParaRPr lang="en-US"/>
           </a:p>
         </p:txBody>
       </p:sp>
@@ -1858,7 +2629,7 @@
           <a:p>
             <a:fld id="{30752F2A-FA59-1746-ABA5-28C394E5ED08}" type="slidenum">
               <a:rPr lang="en-US" smtClean="0"/>
-              <a:t>6</a:t>
+              <a:t>2</a:t>
             </a:fld>
             <a:endParaRPr lang="en-US"/>
           </a:p>
@@ -1867,7 +2638,343 @@
     </p:spTree>
     <p:extLst>
       <p:ext uri="{BB962C8B-B14F-4D97-AF65-F5344CB8AC3E}">
-        <p14:creationId xmlns:p14="http://schemas.microsoft.com/office/powerpoint/2010/main" val="3558101315"/>
+        <p14:creationId xmlns:p14="http://schemas.microsoft.com/office/powerpoint/2010/main" val="315868653"/>
+      </p:ext>
+    </p:extLst>
+  </p:cSld>
+  <p:clrMapOvr>
+    <a:masterClrMapping/>
+  </p:clrMapOvr>
+</p:notes>
+</file>
+
+<file path=ppt/notesSlides/notesSlide20.xml><?xml version="1.0" encoding="utf-8"?>
+<p:notes xmlns:a="http://schemas.openxmlformats.org/drawingml/2006/main" xmlns:r="http://schemas.openxmlformats.org/officeDocument/2006/relationships" xmlns:p="http://schemas.openxmlformats.org/presentationml/2006/main">
+  <p:cSld>
+    <p:spTree>
+      <p:nvGrpSpPr>
+        <p:cNvPr id="1" name=""/>
+        <p:cNvGrpSpPr/>
+        <p:nvPr/>
+      </p:nvGrpSpPr>
+      <p:grpSpPr>
+        <a:xfrm>
+          <a:off x="0" y="0"/>
+          <a:ext cx="0" cy="0"/>
+          <a:chOff x="0" y="0"/>
+          <a:chExt cx="0" cy="0"/>
+        </a:xfrm>
+      </p:grpSpPr>
+      <p:sp>
+        <p:nvSpPr>
+          <p:cNvPr id="2" name="Slide Image Placeholder 1"/>
+          <p:cNvSpPr>
+            <a:spLocks noGrp="1" noRot="1" noChangeAspect="1"/>
+          </p:cNvSpPr>
+          <p:nvPr>
+            <p:ph type="sldImg"/>
+          </p:nvPr>
+        </p:nvSpPr>
+        <p:spPr/>
+      </p:sp>
+      <p:sp>
+        <p:nvSpPr>
+          <p:cNvPr id="3" name="Notes Placeholder 2"/>
+          <p:cNvSpPr>
+            <a:spLocks noGrp="1"/>
+          </p:cNvSpPr>
+          <p:nvPr>
+            <p:ph type="body" idx="1"/>
+          </p:nvPr>
+        </p:nvSpPr>
+        <p:spPr/>
+        <p:txBody>
+          <a:bodyPr/>
+          <a:lstStyle/>
+          <a:p>
+            <a:endParaRPr lang="en-US"/>
+          </a:p>
+        </p:txBody>
+      </p:sp>
+      <p:sp>
+        <p:nvSpPr>
+          <p:cNvPr id="4" name="Slide Number Placeholder 3"/>
+          <p:cNvSpPr>
+            <a:spLocks noGrp="1"/>
+          </p:cNvSpPr>
+          <p:nvPr>
+            <p:ph type="sldNum" sz="quarter" idx="5"/>
+          </p:nvPr>
+        </p:nvSpPr>
+        <p:spPr/>
+        <p:txBody>
+          <a:bodyPr/>
+          <a:lstStyle/>
+          <a:p>
+            <a:fld id="{30752F2A-FA59-1746-ABA5-28C394E5ED08}" type="slidenum">
+              <a:rPr lang="en-US" smtClean="0"/>
+              <a:t>20</a:t>
+            </a:fld>
+            <a:endParaRPr lang="en-US"/>
+          </a:p>
+        </p:txBody>
+      </p:sp>
+    </p:spTree>
+    <p:extLst>
+      <p:ext uri="{BB962C8B-B14F-4D97-AF65-F5344CB8AC3E}">
+        <p14:creationId xmlns:p14="http://schemas.microsoft.com/office/powerpoint/2010/main" val="2493235833"/>
+      </p:ext>
+    </p:extLst>
+  </p:cSld>
+  <p:clrMapOvr>
+    <a:masterClrMapping/>
+  </p:clrMapOvr>
+</p:notes>
+</file>
+
+<file path=ppt/notesSlides/notesSlide21.xml><?xml version="1.0" encoding="utf-8"?>
+<p:notes xmlns:a="http://schemas.openxmlformats.org/drawingml/2006/main" xmlns:r="http://schemas.openxmlformats.org/officeDocument/2006/relationships" xmlns:p="http://schemas.openxmlformats.org/presentationml/2006/main">
+  <p:cSld>
+    <p:spTree>
+      <p:nvGrpSpPr>
+        <p:cNvPr id="1" name=""/>
+        <p:cNvGrpSpPr/>
+        <p:nvPr/>
+      </p:nvGrpSpPr>
+      <p:grpSpPr>
+        <a:xfrm>
+          <a:off x="0" y="0"/>
+          <a:ext cx="0" cy="0"/>
+          <a:chOff x="0" y="0"/>
+          <a:chExt cx="0" cy="0"/>
+        </a:xfrm>
+      </p:grpSpPr>
+      <p:sp>
+        <p:nvSpPr>
+          <p:cNvPr id="2" name="Slide Image Placeholder 1"/>
+          <p:cNvSpPr>
+            <a:spLocks noGrp="1" noRot="1" noChangeAspect="1"/>
+          </p:cNvSpPr>
+          <p:nvPr>
+            <p:ph type="sldImg"/>
+          </p:nvPr>
+        </p:nvSpPr>
+        <p:spPr/>
+      </p:sp>
+      <p:sp>
+        <p:nvSpPr>
+          <p:cNvPr id="3" name="Notes Placeholder 2"/>
+          <p:cNvSpPr>
+            <a:spLocks noGrp="1"/>
+          </p:cNvSpPr>
+          <p:nvPr>
+            <p:ph type="body" idx="1"/>
+          </p:nvPr>
+        </p:nvSpPr>
+        <p:spPr/>
+        <p:txBody>
+          <a:bodyPr/>
+          <a:lstStyle/>
+          <a:p>
+            <a:endParaRPr lang="en-US"/>
+          </a:p>
+        </p:txBody>
+      </p:sp>
+      <p:sp>
+        <p:nvSpPr>
+          <p:cNvPr id="4" name="Slide Number Placeholder 3"/>
+          <p:cNvSpPr>
+            <a:spLocks noGrp="1"/>
+          </p:cNvSpPr>
+          <p:nvPr>
+            <p:ph type="sldNum" sz="quarter" idx="5"/>
+          </p:nvPr>
+        </p:nvSpPr>
+        <p:spPr/>
+        <p:txBody>
+          <a:bodyPr/>
+          <a:lstStyle/>
+          <a:p>
+            <a:fld id="{30752F2A-FA59-1746-ABA5-28C394E5ED08}" type="slidenum">
+              <a:rPr lang="en-US" smtClean="0"/>
+              <a:t>21</a:t>
+            </a:fld>
+            <a:endParaRPr lang="en-US"/>
+          </a:p>
+        </p:txBody>
+      </p:sp>
+    </p:spTree>
+    <p:extLst>
+      <p:ext uri="{BB962C8B-B14F-4D97-AF65-F5344CB8AC3E}">
+        <p14:creationId xmlns:p14="http://schemas.microsoft.com/office/powerpoint/2010/main" val="3306131273"/>
+      </p:ext>
+    </p:extLst>
+  </p:cSld>
+  <p:clrMapOvr>
+    <a:masterClrMapping/>
+  </p:clrMapOvr>
+</p:notes>
+</file>
+
+<file path=ppt/notesSlides/notesSlide22.xml><?xml version="1.0" encoding="utf-8"?>
+<p:notes xmlns:a="http://schemas.openxmlformats.org/drawingml/2006/main" xmlns:r="http://schemas.openxmlformats.org/officeDocument/2006/relationships" xmlns:p="http://schemas.openxmlformats.org/presentationml/2006/main">
+  <p:cSld>
+    <p:spTree>
+      <p:nvGrpSpPr>
+        <p:cNvPr id="1" name=""/>
+        <p:cNvGrpSpPr/>
+        <p:nvPr/>
+      </p:nvGrpSpPr>
+      <p:grpSpPr>
+        <a:xfrm>
+          <a:off x="0" y="0"/>
+          <a:ext cx="0" cy="0"/>
+          <a:chOff x="0" y="0"/>
+          <a:chExt cx="0" cy="0"/>
+        </a:xfrm>
+      </p:grpSpPr>
+      <p:sp>
+        <p:nvSpPr>
+          <p:cNvPr id="2" name="Slide Image Placeholder 1"/>
+          <p:cNvSpPr>
+            <a:spLocks noGrp="1" noRot="1" noChangeAspect="1"/>
+          </p:cNvSpPr>
+          <p:nvPr>
+            <p:ph type="sldImg"/>
+          </p:nvPr>
+        </p:nvSpPr>
+        <p:spPr/>
+      </p:sp>
+      <p:sp>
+        <p:nvSpPr>
+          <p:cNvPr id="3" name="Notes Placeholder 2"/>
+          <p:cNvSpPr>
+            <a:spLocks noGrp="1"/>
+          </p:cNvSpPr>
+          <p:nvPr>
+            <p:ph type="body" idx="1"/>
+          </p:nvPr>
+        </p:nvSpPr>
+        <p:spPr/>
+        <p:txBody>
+          <a:bodyPr/>
+          <a:lstStyle/>
+          <a:p>
+            <a:endParaRPr lang="en-US"/>
+          </a:p>
+        </p:txBody>
+      </p:sp>
+      <p:sp>
+        <p:nvSpPr>
+          <p:cNvPr id="4" name="Slide Number Placeholder 3"/>
+          <p:cNvSpPr>
+            <a:spLocks noGrp="1"/>
+          </p:cNvSpPr>
+          <p:nvPr>
+            <p:ph type="sldNum" sz="quarter" idx="5"/>
+          </p:nvPr>
+        </p:nvSpPr>
+        <p:spPr/>
+        <p:txBody>
+          <a:bodyPr/>
+          <a:lstStyle/>
+          <a:p>
+            <a:fld id="{30752F2A-FA59-1746-ABA5-28C394E5ED08}" type="slidenum">
+              <a:rPr lang="en-US" smtClean="0"/>
+              <a:t>22</a:t>
+            </a:fld>
+            <a:endParaRPr lang="en-US"/>
+          </a:p>
+        </p:txBody>
+      </p:sp>
+    </p:spTree>
+    <p:extLst>
+      <p:ext uri="{BB962C8B-B14F-4D97-AF65-F5344CB8AC3E}">
+        <p14:creationId xmlns:p14="http://schemas.microsoft.com/office/powerpoint/2010/main" val="3198696682"/>
+      </p:ext>
+    </p:extLst>
+  </p:cSld>
+  <p:clrMapOvr>
+    <a:masterClrMapping/>
+  </p:clrMapOvr>
+</p:notes>
+</file>
+
+<file path=ppt/notesSlides/notesSlide23.xml><?xml version="1.0" encoding="utf-8"?>
+<p:notes xmlns:a="http://schemas.openxmlformats.org/drawingml/2006/main" xmlns:r="http://schemas.openxmlformats.org/officeDocument/2006/relationships" xmlns:p="http://schemas.openxmlformats.org/presentationml/2006/main">
+  <p:cSld>
+    <p:spTree>
+      <p:nvGrpSpPr>
+        <p:cNvPr id="1" name=""/>
+        <p:cNvGrpSpPr/>
+        <p:nvPr/>
+      </p:nvGrpSpPr>
+      <p:grpSpPr>
+        <a:xfrm>
+          <a:off x="0" y="0"/>
+          <a:ext cx="0" cy="0"/>
+          <a:chOff x="0" y="0"/>
+          <a:chExt cx="0" cy="0"/>
+        </a:xfrm>
+      </p:grpSpPr>
+      <p:sp>
+        <p:nvSpPr>
+          <p:cNvPr id="2" name="Slide Image Placeholder 1"/>
+          <p:cNvSpPr>
+            <a:spLocks noGrp="1" noRot="1" noChangeAspect="1"/>
+          </p:cNvSpPr>
+          <p:nvPr>
+            <p:ph type="sldImg"/>
+          </p:nvPr>
+        </p:nvSpPr>
+        <p:spPr/>
+      </p:sp>
+      <p:sp>
+        <p:nvSpPr>
+          <p:cNvPr id="3" name="Notes Placeholder 2"/>
+          <p:cNvSpPr>
+            <a:spLocks noGrp="1"/>
+          </p:cNvSpPr>
+          <p:nvPr>
+            <p:ph type="body" idx="1"/>
+          </p:nvPr>
+        </p:nvSpPr>
+        <p:spPr/>
+        <p:txBody>
+          <a:bodyPr/>
+          <a:lstStyle/>
+          <a:p>
+            <a:endParaRPr lang="en-US"/>
+          </a:p>
+        </p:txBody>
+      </p:sp>
+      <p:sp>
+        <p:nvSpPr>
+          <p:cNvPr id="4" name="Slide Number Placeholder 3"/>
+          <p:cNvSpPr>
+            <a:spLocks noGrp="1"/>
+          </p:cNvSpPr>
+          <p:nvPr>
+            <p:ph type="sldNum" sz="quarter" idx="5"/>
+          </p:nvPr>
+        </p:nvSpPr>
+        <p:spPr/>
+        <p:txBody>
+          <a:bodyPr/>
+          <a:lstStyle/>
+          <a:p>
+            <a:fld id="{30752F2A-FA59-1746-ABA5-28C394E5ED08}" type="slidenum">
+              <a:rPr lang="en-US" smtClean="0"/>
+              <a:t>23</a:t>
+            </a:fld>
+            <a:endParaRPr lang="en-US"/>
+          </a:p>
+        </p:txBody>
+      </p:sp>
+    </p:spTree>
+    <p:extLst>
+      <p:ext uri="{BB962C8B-B14F-4D97-AF65-F5344CB8AC3E}">
+        <p14:creationId xmlns:p14="http://schemas.microsoft.com/office/powerpoint/2010/main" val="1304578908"/>
       </p:ext>
     </p:extLst>
   </p:cSld>
@@ -1921,58 +3028,7 @@
           <a:bodyPr/>
           <a:lstStyle/>
           <a:p>
-            <a:r>
-              <a:rPr lang="en-US" dirty="0"/>
-              <a:t>Do not modify the notes in this section to avoid tampering with the Poll Everywhere activity.
-More info at </a:t>
-            </a:r>
-            <a:r>
-              <a:rPr lang="en-US" dirty="0" err="1"/>
-              <a:t>polleverywhere.com</a:t>
-            </a:r>
-            <a:r>
-              <a:rPr lang="en-US" dirty="0"/>
-              <a:t>/support
-Suppose a model always predicts a 50% probability of rain ($$p = 0.5$$) for every single day. If it actually rains on exactly 50% of the days, what is the Brier Score of this model, and what does it reveal about the forecast quality?</a:t>
-            </a:r>
-          </a:p>
-          <a:p>
-            <a:r>
-              <a:rPr lang="en-US" dirty="0"/>
-              <a:t>https://</a:t>
-            </a:r>
-            <a:r>
-              <a:rPr lang="en-US" dirty="0" err="1"/>
-              <a:t>www.polleverywhere.com</a:t>
-            </a:r>
-            <a:r>
-              <a:rPr lang="en-US" dirty="0"/>
-              <a:t>/</a:t>
-            </a:r>
-            <a:r>
-              <a:rPr lang="en-US" dirty="0" err="1"/>
-              <a:t>multiple_choice_polls</a:t>
-            </a:r>
-            <a:r>
-              <a:rPr lang="en-US" dirty="0"/>
-              <a:t>/vd3UrKUYILga0TJnv0kQ2?state=</a:t>
-            </a:r>
-            <a:r>
-              <a:rPr lang="en-US" dirty="0" err="1"/>
-              <a:t>opened&amp;flow</a:t>
-            </a:r>
-            <a:r>
-              <a:rPr lang="en-US" dirty="0"/>
-              <a:t>=</a:t>
-            </a:r>
-            <a:r>
-              <a:rPr lang="en-US" dirty="0" err="1"/>
-              <a:t>Default&amp;onscreen</a:t>
-            </a:r>
-            <a:r>
-              <a:rPr lang="en-US" dirty="0"/>
-              <a:t>=persist</a:t>
-            </a:r>
+            <a:endParaRPr lang="en-US"/>
           </a:p>
         </p:txBody>
       </p:sp>
@@ -1993,7 +3049,7 @@
           <a:p>
             <a:fld id="{30752F2A-FA59-1746-ABA5-28C394E5ED08}" type="slidenum">
               <a:rPr lang="en-US" smtClean="0"/>
-              <a:t>7</a:t>
+              <a:t>3</a:t>
             </a:fld>
             <a:endParaRPr lang="en-US"/>
           </a:p>
@@ -2002,7 +3058,7 @@
     </p:spTree>
     <p:extLst>
       <p:ext uri="{BB962C8B-B14F-4D97-AF65-F5344CB8AC3E}">
-        <p14:creationId xmlns:p14="http://schemas.microsoft.com/office/powerpoint/2010/main" val="3123433741"/>
+        <p14:creationId xmlns:p14="http://schemas.microsoft.com/office/powerpoint/2010/main" val="435360224"/>
       </p:ext>
     </p:extLst>
   </p:cSld>
@@ -2057,17 +3113,34 @@
           <a:lstStyle/>
           <a:p>
             <a:r>
-              <a:rPr lang="en-US"/>
-              <a:t>Do not modify the notes in this section to avoid tampering with the Poll Everywhere activity.
-More info at polleverywhere.com/support
-The CRPS is often described as a generalisation of the Mean Absolute Error (MAE). If a model provides a perfectly "sharp" deterministic forecast (where the standard deviation $$\sigma$$ is zero), what does the CRPS value become?</a:t>
-            </a:r>
-          </a:p>
-          <a:p>
-            <a:r>
-              <a:rPr lang="en-US"/>
-              <a:t>https://www.polleverywhere.com/multiple_choice_polls/P3B4HihRUR32bagwfF4v6?state=opened&amp;flow=Default&amp;onscreen=persist</a:t>
-            </a:r>
+              <a:rPr lang="en-IE" dirty="0"/>
+              <a:t>If you use Mean Absolute Error (MAE) as a loss function, the "optimal" strategy for the model is to predict the </a:t>
+            </a:r>
+            <a:r>
+              <a:rPr lang="en-IE" b="1" dirty="0"/>
+              <a:t>median</a:t>
+            </a:r>
+            <a:r>
+              <a:rPr lang="en-IE" dirty="0"/>
+              <a:t>. If you use Mean Squared Error (MSE), it predicts the </a:t>
+            </a:r>
+            <a:r>
+              <a:rPr lang="en-IE" b="1" dirty="0"/>
+              <a:t>mean</a:t>
+            </a:r>
+            <a:r>
+              <a:rPr lang="en-IE" dirty="0"/>
+              <a:t>. Only proper scoring rules like CRPS force the model to estimate the </a:t>
+            </a:r>
+            <a:r>
+              <a:rPr lang="en-IE" b="1" dirty="0"/>
+              <a:t>entire distribution</a:t>
+            </a:r>
+            <a:r>
+              <a:rPr lang="en-IE" dirty="0"/>
+              <a:t> honestly.</a:t>
+            </a:r>
+            <a:endParaRPr lang="en-US" dirty="0"/>
           </a:p>
         </p:txBody>
       </p:sp>
@@ -2088,7 +3161,7 @@
           <a:p>
             <a:fld id="{30752F2A-FA59-1746-ABA5-28C394E5ED08}" type="slidenum">
               <a:rPr lang="en-US" smtClean="0"/>
-              <a:t>10</a:t>
+              <a:t>4</a:t>
             </a:fld>
             <a:endParaRPr lang="en-US"/>
           </a:p>
@@ -2097,7 +3170,530 @@
     </p:spTree>
     <p:extLst>
       <p:ext uri="{BB962C8B-B14F-4D97-AF65-F5344CB8AC3E}">
-        <p14:creationId xmlns:p14="http://schemas.microsoft.com/office/powerpoint/2010/main" val="3046797145"/>
+        <p14:creationId xmlns:p14="http://schemas.microsoft.com/office/powerpoint/2010/main" val="1027432635"/>
+      </p:ext>
+    </p:extLst>
+  </p:cSld>
+  <p:clrMapOvr>
+    <a:masterClrMapping/>
+  </p:clrMapOvr>
+</p:notes>
+</file>
+
+<file path=ppt/notesSlides/notesSlide5.xml><?xml version="1.0" encoding="utf-8"?>
+<p:notes xmlns:a="http://schemas.openxmlformats.org/drawingml/2006/main" xmlns:r="http://schemas.openxmlformats.org/officeDocument/2006/relationships" xmlns:p="http://schemas.openxmlformats.org/presentationml/2006/main">
+  <p:cSld>
+    <p:spTree>
+      <p:nvGrpSpPr>
+        <p:cNvPr id="1" name=""/>
+        <p:cNvGrpSpPr/>
+        <p:nvPr/>
+      </p:nvGrpSpPr>
+      <p:grpSpPr>
+        <a:xfrm>
+          <a:off x="0" y="0"/>
+          <a:ext cx="0" cy="0"/>
+          <a:chOff x="0" y="0"/>
+          <a:chExt cx="0" cy="0"/>
+        </a:xfrm>
+      </p:grpSpPr>
+      <p:sp>
+        <p:nvSpPr>
+          <p:cNvPr id="2" name="Slide Image Placeholder 1"/>
+          <p:cNvSpPr>
+            <a:spLocks noGrp="1" noRot="1" noChangeAspect="1"/>
+          </p:cNvSpPr>
+          <p:nvPr>
+            <p:ph type="sldImg"/>
+          </p:nvPr>
+        </p:nvSpPr>
+        <p:spPr/>
+      </p:sp>
+      <p:sp>
+        <p:nvSpPr>
+          <p:cNvPr id="3" name="Notes Placeholder 2"/>
+          <p:cNvSpPr>
+            <a:spLocks noGrp="1"/>
+          </p:cNvSpPr>
+          <p:nvPr>
+            <p:ph type="body" idx="1"/>
+          </p:nvPr>
+        </p:nvSpPr>
+        <p:spPr/>
+        <p:txBody>
+          <a:bodyPr/>
+          <a:lstStyle/>
+          <a:p>
+            <a:endParaRPr lang="en-US"/>
+          </a:p>
+        </p:txBody>
+      </p:sp>
+      <p:sp>
+        <p:nvSpPr>
+          <p:cNvPr id="4" name="Slide Number Placeholder 3"/>
+          <p:cNvSpPr>
+            <a:spLocks noGrp="1"/>
+          </p:cNvSpPr>
+          <p:nvPr>
+            <p:ph type="sldNum" sz="quarter" idx="5"/>
+          </p:nvPr>
+        </p:nvSpPr>
+        <p:spPr/>
+        <p:txBody>
+          <a:bodyPr/>
+          <a:lstStyle/>
+          <a:p>
+            <a:fld id="{30752F2A-FA59-1746-ABA5-28C394E5ED08}" type="slidenum">
+              <a:rPr lang="en-US" smtClean="0"/>
+              <a:t>5</a:t>
+            </a:fld>
+            <a:endParaRPr lang="en-US"/>
+          </a:p>
+        </p:txBody>
+      </p:sp>
+    </p:spTree>
+    <p:extLst>
+      <p:ext uri="{BB962C8B-B14F-4D97-AF65-F5344CB8AC3E}">
+        <p14:creationId xmlns:p14="http://schemas.microsoft.com/office/powerpoint/2010/main" val="1065818733"/>
+      </p:ext>
+    </p:extLst>
+  </p:cSld>
+  <p:clrMapOvr>
+    <a:masterClrMapping/>
+  </p:clrMapOvr>
+</p:notes>
+</file>
+
+<file path=ppt/notesSlides/notesSlide6.xml><?xml version="1.0" encoding="utf-8"?>
+<p:notes xmlns:a="http://schemas.openxmlformats.org/drawingml/2006/main" xmlns:r="http://schemas.openxmlformats.org/officeDocument/2006/relationships" xmlns:p="http://schemas.openxmlformats.org/presentationml/2006/main">
+  <p:cSld>
+    <p:spTree>
+      <p:nvGrpSpPr>
+        <p:cNvPr id="1" name=""/>
+        <p:cNvGrpSpPr/>
+        <p:nvPr/>
+      </p:nvGrpSpPr>
+      <p:grpSpPr>
+        <a:xfrm>
+          <a:off x="0" y="0"/>
+          <a:ext cx="0" cy="0"/>
+          <a:chOff x="0" y="0"/>
+          <a:chExt cx="0" cy="0"/>
+        </a:xfrm>
+      </p:grpSpPr>
+      <p:sp>
+        <p:nvSpPr>
+          <p:cNvPr id="2" name="Slide Image Placeholder 1"/>
+          <p:cNvSpPr>
+            <a:spLocks noGrp="1" noRot="1" noChangeAspect="1"/>
+          </p:cNvSpPr>
+          <p:nvPr>
+            <p:ph type="sldImg"/>
+          </p:nvPr>
+        </p:nvSpPr>
+        <p:spPr/>
+      </p:sp>
+      <p:sp>
+        <p:nvSpPr>
+          <p:cNvPr id="3" name="Notes Placeholder 2"/>
+          <p:cNvSpPr>
+            <a:spLocks noGrp="1"/>
+          </p:cNvSpPr>
+          <p:nvPr>
+            <p:ph type="body" idx="1"/>
+          </p:nvPr>
+        </p:nvSpPr>
+        <p:spPr/>
+        <p:txBody>
+          <a:bodyPr/>
+          <a:lstStyle/>
+          <a:p>
+            <a:r>
+              <a:rPr lang="en-IE" dirty="0"/>
+              <a:t>Reasoning: </a:t>
+            </a:r>
+            <a:r>
+              <a:rPr lang="en-IE" sz="1200" kern="1200" dirty="0">
+                <a:solidFill>
+                  <a:schemeClr val="tx1"/>
+                </a:solidFill>
+                <a:effectLst/>
+                <a:latin typeface="+mn-lt"/>
+                <a:ea typeface="+mn-ea"/>
+                <a:cs typeface="+mn-cs"/>
+              </a:rPr>
+              <a:t>$(0.5 - 1)^2 = 0.25$</a:t>
+            </a:r>
+            <a:r>
+              <a:rPr lang="en-IE" dirty="0"/>
+              <a:t> and </a:t>
+            </a:r>
+            <a:r>
+              <a:rPr lang="en-IE" sz="1200" kern="1200" dirty="0">
+                <a:solidFill>
+                  <a:schemeClr val="tx1"/>
+                </a:solidFill>
+                <a:effectLst/>
+                <a:latin typeface="+mn-lt"/>
+                <a:ea typeface="+mn-ea"/>
+                <a:cs typeface="+mn-cs"/>
+              </a:rPr>
+              <a:t>$(0.5 - 0)^2 = 0.25$</a:t>
+            </a:r>
+            <a:r>
+              <a:rPr lang="en-IE" dirty="0"/>
+              <a:t>. Since rain happens 50% of the time, the average score is </a:t>
+            </a:r>
+            <a:r>
+              <a:rPr lang="en-IE" sz="1200" kern="1200" dirty="0">
+                <a:solidFill>
+                  <a:schemeClr val="tx1"/>
+                </a:solidFill>
+                <a:effectLst/>
+                <a:latin typeface="+mn-lt"/>
+                <a:ea typeface="+mn-ea"/>
+                <a:cs typeface="+mn-cs"/>
+              </a:rPr>
+              <a:t>$0.25$</a:t>
+            </a:r>
+            <a:r>
+              <a:rPr lang="en-IE" dirty="0"/>
+              <a:t>. This teaches students that a Brier Score can be "okay" while the forecast is still "unsharp" (uninformative).</a:t>
+            </a:r>
+            <a:endParaRPr lang="en-US" dirty="0"/>
+          </a:p>
+        </p:txBody>
+      </p:sp>
+      <p:sp>
+        <p:nvSpPr>
+          <p:cNvPr id="4" name="Slide Number Placeholder 3"/>
+          <p:cNvSpPr>
+            <a:spLocks noGrp="1"/>
+          </p:cNvSpPr>
+          <p:nvPr>
+            <p:ph type="sldNum" sz="quarter" idx="5"/>
+          </p:nvPr>
+        </p:nvSpPr>
+        <p:spPr/>
+        <p:txBody>
+          <a:bodyPr/>
+          <a:lstStyle/>
+          <a:p>
+            <a:fld id="{30752F2A-FA59-1746-ABA5-28C394E5ED08}" type="slidenum">
+              <a:rPr lang="en-US" smtClean="0"/>
+              <a:t>6</a:t>
+            </a:fld>
+            <a:endParaRPr lang="en-US"/>
+          </a:p>
+        </p:txBody>
+      </p:sp>
+    </p:spTree>
+    <p:extLst>
+      <p:ext uri="{BB962C8B-B14F-4D97-AF65-F5344CB8AC3E}">
+        <p14:creationId xmlns:p14="http://schemas.microsoft.com/office/powerpoint/2010/main" val="3558101315"/>
+      </p:ext>
+    </p:extLst>
+  </p:cSld>
+  <p:clrMapOvr>
+    <a:masterClrMapping/>
+  </p:clrMapOvr>
+</p:notes>
+</file>
+
+<file path=ppt/notesSlides/notesSlide7.xml><?xml version="1.0" encoding="utf-8"?>
+<p:notes xmlns:a="http://schemas.openxmlformats.org/drawingml/2006/main" xmlns:r="http://schemas.openxmlformats.org/officeDocument/2006/relationships" xmlns:p="http://schemas.openxmlformats.org/presentationml/2006/main">
+  <p:cSld>
+    <p:spTree>
+      <p:nvGrpSpPr>
+        <p:cNvPr id="1" name=""/>
+        <p:cNvGrpSpPr/>
+        <p:nvPr/>
+      </p:nvGrpSpPr>
+      <p:grpSpPr>
+        <a:xfrm>
+          <a:off x="0" y="0"/>
+          <a:ext cx="0" cy="0"/>
+          <a:chOff x="0" y="0"/>
+          <a:chExt cx="0" cy="0"/>
+        </a:xfrm>
+      </p:grpSpPr>
+      <p:sp>
+        <p:nvSpPr>
+          <p:cNvPr id="2" name="Slide Image Placeholder 1"/>
+          <p:cNvSpPr>
+            <a:spLocks noGrp="1" noRot="1" noChangeAspect="1"/>
+          </p:cNvSpPr>
+          <p:nvPr>
+            <p:ph type="sldImg"/>
+          </p:nvPr>
+        </p:nvSpPr>
+        <p:spPr/>
+      </p:sp>
+      <p:sp>
+        <p:nvSpPr>
+          <p:cNvPr id="3" name="Notes Placeholder 2"/>
+          <p:cNvSpPr>
+            <a:spLocks noGrp="1"/>
+          </p:cNvSpPr>
+          <p:nvPr>
+            <p:ph type="body" idx="1"/>
+          </p:nvPr>
+        </p:nvSpPr>
+        <p:spPr/>
+        <p:txBody>
+          <a:bodyPr/>
+          <a:lstStyle/>
+          <a:p>
+            <a:r>
+              <a:rPr lang="en-US" dirty="0"/>
+              <a:t>Do not modify the notes in this section to avoid tampering with the Poll Everywhere activity.
+More info at </a:t>
+            </a:r>
+            <a:r>
+              <a:rPr lang="en-US" dirty="0" err="1"/>
+              <a:t>polleverywhere.com</a:t>
+            </a:r>
+            <a:r>
+              <a:rPr lang="en-US" dirty="0"/>
+              <a:t>/support
+Suppose a model always predicts a 50% probability of rain ($$p = 0.5$$) for every single day. If it actually rains on exactly 50% of the days, what is the Brier Score of this model, and what does it reveal about the forecast quality?</a:t>
+            </a:r>
+          </a:p>
+          <a:p>
+            <a:r>
+              <a:rPr lang="en-US" dirty="0"/>
+              <a:t>https://</a:t>
+            </a:r>
+            <a:r>
+              <a:rPr lang="en-US" dirty="0" err="1"/>
+              <a:t>www.polleverywhere.com</a:t>
+            </a:r>
+            <a:r>
+              <a:rPr lang="en-US" dirty="0"/>
+              <a:t>/</a:t>
+            </a:r>
+            <a:r>
+              <a:rPr lang="en-US" dirty="0" err="1"/>
+              <a:t>multiple_choice_polls</a:t>
+            </a:r>
+            <a:r>
+              <a:rPr lang="en-US" dirty="0"/>
+              <a:t>/vd3UrKUYILga0TJnv0kQ2?state=</a:t>
+            </a:r>
+            <a:r>
+              <a:rPr lang="en-US" dirty="0" err="1"/>
+              <a:t>opened&amp;flow</a:t>
+            </a:r>
+            <a:r>
+              <a:rPr lang="en-US" dirty="0"/>
+              <a:t>=</a:t>
+            </a:r>
+            <a:r>
+              <a:rPr lang="en-US" dirty="0" err="1"/>
+              <a:t>Default&amp;onscreen</a:t>
+            </a:r>
+            <a:r>
+              <a:rPr lang="en-US" dirty="0"/>
+              <a:t>=persist</a:t>
+            </a:r>
+          </a:p>
+        </p:txBody>
+      </p:sp>
+      <p:sp>
+        <p:nvSpPr>
+          <p:cNvPr id="4" name="Slide Number Placeholder 3"/>
+          <p:cNvSpPr>
+            <a:spLocks noGrp="1"/>
+          </p:cNvSpPr>
+          <p:nvPr>
+            <p:ph type="sldNum" sz="quarter" idx="5"/>
+          </p:nvPr>
+        </p:nvSpPr>
+        <p:spPr/>
+        <p:txBody>
+          <a:bodyPr/>
+          <a:lstStyle/>
+          <a:p>
+            <a:fld id="{30752F2A-FA59-1746-ABA5-28C394E5ED08}" type="slidenum">
+              <a:rPr lang="en-US" smtClean="0"/>
+              <a:t>7</a:t>
+            </a:fld>
+            <a:endParaRPr lang="en-US"/>
+          </a:p>
+        </p:txBody>
+      </p:sp>
+    </p:spTree>
+    <p:extLst>
+      <p:ext uri="{BB962C8B-B14F-4D97-AF65-F5344CB8AC3E}">
+        <p14:creationId xmlns:p14="http://schemas.microsoft.com/office/powerpoint/2010/main" val="3123433741"/>
+      </p:ext>
+    </p:extLst>
+  </p:cSld>
+  <p:clrMapOvr>
+    <a:masterClrMapping/>
+  </p:clrMapOvr>
+</p:notes>
+</file>
+
+<file path=ppt/notesSlides/notesSlide8.xml><?xml version="1.0" encoding="utf-8"?>
+<p:notes xmlns:a="http://schemas.openxmlformats.org/drawingml/2006/main" xmlns:r="http://schemas.openxmlformats.org/officeDocument/2006/relationships" xmlns:p="http://schemas.openxmlformats.org/presentationml/2006/main">
+  <p:cSld>
+    <p:spTree>
+      <p:nvGrpSpPr>
+        <p:cNvPr id="1" name=""/>
+        <p:cNvGrpSpPr/>
+        <p:nvPr/>
+      </p:nvGrpSpPr>
+      <p:grpSpPr>
+        <a:xfrm>
+          <a:off x="0" y="0"/>
+          <a:ext cx="0" cy="0"/>
+          <a:chOff x="0" y="0"/>
+          <a:chExt cx="0" cy="0"/>
+        </a:xfrm>
+      </p:grpSpPr>
+      <p:sp>
+        <p:nvSpPr>
+          <p:cNvPr id="2" name="Slide Image Placeholder 1"/>
+          <p:cNvSpPr>
+            <a:spLocks noGrp="1" noRot="1" noChangeAspect="1"/>
+          </p:cNvSpPr>
+          <p:nvPr>
+            <p:ph type="sldImg"/>
+          </p:nvPr>
+        </p:nvSpPr>
+        <p:spPr/>
+      </p:sp>
+      <p:sp>
+        <p:nvSpPr>
+          <p:cNvPr id="3" name="Notes Placeholder 2"/>
+          <p:cNvSpPr>
+            <a:spLocks noGrp="1"/>
+          </p:cNvSpPr>
+          <p:nvPr>
+            <p:ph type="body" idx="1"/>
+          </p:nvPr>
+        </p:nvSpPr>
+        <p:spPr/>
+        <p:txBody>
+          <a:bodyPr/>
+          <a:lstStyle/>
+          <a:p>
+            <a:endParaRPr lang="en-US"/>
+          </a:p>
+        </p:txBody>
+      </p:sp>
+      <p:sp>
+        <p:nvSpPr>
+          <p:cNvPr id="4" name="Slide Number Placeholder 3"/>
+          <p:cNvSpPr>
+            <a:spLocks noGrp="1"/>
+          </p:cNvSpPr>
+          <p:nvPr>
+            <p:ph type="sldNum" sz="quarter" idx="5"/>
+          </p:nvPr>
+        </p:nvSpPr>
+        <p:spPr/>
+        <p:txBody>
+          <a:bodyPr/>
+          <a:lstStyle/>
+          <a:p>
+            <a:fld id="{30752F2A-FA59-1746-ABA5-28C394E5ED08}" type="slidenum">
+              <a:rPr lang="en-US" smtClean="0"/>
+              <a:t>8</a:t>
+            </a:fld>
+            <a:endParaRPr lang="en-US"/>
+          </a:p>
+        </p:txBody>
+      </p:sp>
+    </p:spTree>
+    <p:extLst>
+      <p:ext uri="{BB962C8B-B14F-4D97-AF65-F5344CB8AC3E}">
+        <p14:creationId xmlns:p14="http://schemas.microsoft.com/office/powerpoint/2010/main" val="4035115818"/>
+      </p:ext>
+    </p:extLst>
+  </p:cSld>
+  <p:clrMapOvr>
+    <a:masterClrMapping/>
+  </p:clrMapOvr>
+</p:notes>
+</file>
+
+<file path=ppt/notesSlides/notesSlide9.xml><?xml version="1.0" encoding="utf-8"?>
+<p:notes xmlns:a="http://schemas.openxmlformats.org/drawingml/2006/main" xmlns:r="http://schemas.openxmlformats.org/officeDocument/2006/relationships" xmlns:p="http://schemas.openxmlformats.org/presentationml/2006/main">
+  <p:cSld>
+    <p:spTree>
+      <p:nvGrpSpPr>
+        <p:cNvPr id="1" name=""/>
+        <p:cNvGrpSpPr/>
+        <p:nvPr/>
+      </p:nvGrpSpPr>
+      <p:grpSpPr>
+        <a:xfrm>
+          <a:off x="0" y="0"/>
+          <a:ext cx="0" cy="0"/>
+          <a:chOff x="0" y="0"/>
+          <a:chExt cx="0" cy="0"/>
+        </a:xfrm>
+      </p:grpSpPr>
+      <p:sp>
+        <p:nvSpPr>
+          <p:cNvPr id="2" name="Slide Image Placeholder 1"/>
+          <p:cNvSpPr>
+            <a:spLocks noGrp="1" noRot="1" noChangeAspect="1"/>
+          </p:cNvSpPr>
+          <p:nvPr>
+            <p:ph type="sldImg"/>
+          </p:nvPr>
+        </p:nvSpPr>
+        <p:spPr/>
+      </p:sp>
+      <p:sp>
+        <p:nvSpPr>
+          <p:cNvPr id="3" name="Notes Placeholder 2"/>
+          <p:cNvSpPr>
+            <a:spLocks noGrp="1"/>
+          </p:cNvSpPr>
+          <p:nvPr>
+            <p:ph type="body" idx="1"/>
+          </p:nvPr>
+        </p:nvSpPr>
+        <p:spPr/>
+        <p:txBody>
+          <a:bodyPr/>
+          <a:lstStyle/>
+          <a:p>
+            <a:endParaRPr lang="en-US"/>
+          </a:p>
+        </p:txBody>
+      </p:sp>
+      <p:sp>
+        <p:nvSpPr>
+          <p:cNvPr id="4" name="Slide Number Placeholder 3"/>
+          <p:cNvSpPr>
+            <a:spLocks noGrp="1"/>
+          </p:cNvSpPr>
+          <p:nvPr>
+            <p:ph type="sldNum" sz="quarter" idx="5"/>
+          </p:nvPr>
+        </p:nvSpPr>
+        <p:spPr/>
+        <p:txBody>
+          <a:bodyPr/>
+          <a:lstStyle/>
+          <a:p>
+            <a:fld id="{30752F2A-FA59-1746-ABA5-28C394E5ED08}" type="slidenum">
+              <a:rPr lang="en-US" smtClean="0"/>
+              <a:t>9</a:t>
+            </a:fld>
+            <a:endParaRPr lang="en-US"/>
+          </a:p>
+        </p:txBody>
+      </p:sp>
+    </p:spTree>
+    <p:extLst>
+      <p:ext uri="{BB962C8B-B14F-4D97-AF65-F5344CB8AC3E}">
+        <p14:creationId xmlns:p14="http://schemas.microsoft.com/office/powerpoint/2010/main" val="3678109291"/>
       </p:ext>
     </p:extLst>
   </p:cSld>
@@ -2223,7 +3819,7 @@
           <a:p>
             <a:fld id="{D7043C3A-33ED-42EC-99E6-B5FE9049A83B}" type="datetime3">
               <a:rPr lang="en-IE" smtClean="0"/>
-              <a:t>28 February 2026</a:t>
+              <a:t>2 March 2026</a:t>
             </a:fld>
             <a:endParaRPr lang="en-US" dirty="0"/>
           </a:p>
@@ -3273,7 +4869,7 @@
           <a:p>
             <a:fld id="{A20550B1-742F-4033-AAB7-DC28BBBCACAB}" type="datetime3">
               <a:rPr lang="en-IE" smtClean="0"/>
-              <a:t>28 February 2026</a:t>
+              <a:t>2 March 2026</a:t>
             </a:fld>
             <a:endParaRPr lang="en-US" dirty="0"/>
           </a:p>
@@ -3550,7 +5146,7 @@
           <a:p>
             <a:fld id="{F1E91F8A-F806-4B78-A2A3-404C465D9606}" type="datetime3">
               <a:rPr lang="en-IE" smtClean="0"/>
-              <a:t>28 February 2026</a:t>
+              <a:t>2 March 2026</a:t>
             </a:fld>
             <a:endParaRPr lang="en-US" dirty="0"/>
           </a:p>
@@ -5726,7 +7322,7 @@
             </p:nvSpPr>
             <p:spPr>
               <a:blipFill>
-                <a:blip r:embed="rId2"/>
+                <a:blip r:embed="rId3"/>
                 <a:stretch>
                   <a:fillRect l="-1368" t="-2439"/>
                 </a:stretch>
@@ -5941,7 +7537,7 @@
                 <a:ext cx="2792104" cy="4351338"/>
               </a:xfrm>
               <a:blipFill>
-                <a:blip r:embed="rId2"/>
+                <a:blip r:embed="rId3"/>
                 <a:stretch>
                   <a:fillRect l="-4072" t="-2326" r="-6787"/>
                 </a:stretch>
@@ -6962,7 +8558,7 @@
           </p:nvPr>
         </p:nvPicPr>
         <p:blipFill>
-          <a:blip r:embed="rId2"/>
+          <a:blip r:embed="rId3"/>
           <a:stretch>
             <a:fillRect/>
           </a:stretch>
@@ -7148,7 +8744,7 @@
           </p:nvPr>
         </p:nvPicPr>
         <p:blipFill>
-          <a:blip r:embed="rId2"/>
+          <a:blip r:embed="rId3"/>
           <a:stretch>
             <a:fillRect/>
           </a:stretch>
@@ -7512,7 +9108,7 @@
             </p:nvSpPr>
             <p:spPr>
               <a:blipFill>
-                <a:blip r:embed="rId2"/>
+                <a:blip r:embed="rId3"/>
                 <a:stretch>
                   <a:fillRect l="-1216" t="-1829" r="-912" b="-915"/>
                 </a:stretch>
@@ -8141,7 +9737,7 @@
             </p:nvSpPr>
             <p:spPr>
               <a:blipFill>
-                <a:blip r:embed="rId2"/>
+                <a:blip r:embed="rId3"/>
                 <a:stretch>
                   <a:fillRect l="-1216" t="-3659" r="-1368"/>
                 </a:stretch>
@@ -8266,7 +9862,7 @@
           </p:nvPr>
         </p:nvPicPr>
         <p:blipFill>
-          <a:blip r:embed="rId2"/>
+          <a:blip r:embed="rId3"/>
           <a:stretch>
             <a:fillRect/>
           </a:stretch>
@@ -8778,7 +10374,7 @@
         </p:xfrm>
         <a:graphic>
           <a:graphicData uri="http://schemas.openxmlformats.org/drawingml/2006/chart">
-            <c:chart xmlns:c="http://schemas.openxmlformats.org/drawingml/2006/chart" xmlns:r="http://schemas.openxmlformats.org/officeDocument/2006/relationships" r:id="rId2"/>
+            <c:chart xmlns:c="http://schemas.openxmlformats.org/drawingml/2006/chart" xmlns:r="http://schemas.openxmlformats.org/officeDocument/2006/relationships" r:id="rId3"/>
           </a:graphicData>
         </a:graphic>
       </p:graphicFrame>
@@ -9133,7 +10729,7 @@
 </file>
 
 <file path=ppt/slides/slide24.xml><?xml version="1.0" encoding="utf-8"?>
-<p:sld xmlns:a="http://schemas.openxmlformats.org/drawingml/2006/main" xmlns:r="http://schemas.openxmlformats.org/officeDocument/2006/relationships" xmlns:p="http://schemas.openxmlformats.org/presentationml/2006/main">
+<p:sld xmlns:a="http://schemas.openxmlformats.org/drawingml/2006/main" xmlns:r="http://schemas.openxmlformats.org/officeDocument/2006/relationships" xmlns:p="http://schemas.openxmlformats.org/presentationml/2006/main" show="0">
   <p:cSld>
     <p:spTree>
       <p:nvGrpSpPr>
@@ -9366,7 +10962,7 @@
         </p:xfrm>
         <a:graphic>
           <a:graphicData uri="http://schemas.openxmlformats.org/drawingml/2006/chart">
-            <c:chart xmlns:c="http://schemas.openxmlformats.org/drawingml/2006/chart" xmlns:r="http://schemas.openxmlformats.org/officeDocument/2006/relationships" r:id="rId2"/>
+            <c:chart xmlns:c="http://schemas.openxmlformats.org/drawingml/2006/chart" xmlns:r="http://schemas.openxmlformats.org/officeDocument/2006/relationships" r:id="rId3"/>
           </a:graphicData>
         </a:graphic>
       </p:graphicFrame>
@@ -10145,7 +11741,7 @@
         </p:xfrm>
         <a:graphic>
           <a:graphicData uri="http://schemas.openxmlformats.org/drawingml/2006/chart">
-            <c:chart xmlns:c="http://schemas.openxmlformats.org/drawingml/2006/chart" xmlns:r="http://schemas.openxmlformats.org/officeDocument/2006/relationships" r:id="rId2"/>
+            <c:chart xmlns:c="http://schemas.openxmlformats.org/drawingml/2006/chart" xmlns:r="http://schemas.openxmlformats.org/officeDocument/2006/relationships" r:id="rId3"/>
           </a:graphicData>
         </a:graphic>
       </p:graphicFrame>
@@ -11211,7 +12807,7 @@
                 <a:ext cx="7518816" cy="4149290"/>
               </a:xfrm>
               <a:blipFill>
-                <a:blip r:embed="rId2"/>
+                <a:blip r:embed="rId3"/>
                 <a:stretch>
                   <a:fillRect l="-1518" t="-2439"/>
                 </a:stretch>
@@ -11657,7 +13253,7 @@
                 <a:ext cx="8348602" cy="4149290"/>
               </a:xfrm>
               <a:blipFill>
-                <a:blip r:embed="rId2"/>
+                <a:blip r:embed="rId3"/>
                 <a:stretch>
                   <a:fillRect l="-1368" t="-3354" r="-912"/>
                 </a:stretch>
